--- a/docs/numba_slide.pptx
+++ b/docs/numba_slide.pptx
@@ -3104,7 +3104,7 @@
         </p:nvSpPr>
         <p:spPr>
           <a:xfrm>
-            <a:off x="457200" y="292608"/>
+            <a:off x="457200" y="228600"/>
             <a:ext cx="594360" cy="301752"/>
           </a:xfrm>
           <a:prstGeom prst="rect">
@@ -3148,7 +3148,7 @@
         </p:nvSpPr>
         <p:spPr>
           <a:xfrm>
-            <a:off x="457200" y="292608"/>
+            <a:off x="457200" y="228600"/>
             <a:ext cx="594360" cy="301752"/>
           </a:xfrm>
           <a:prstGeom prst="rect">
@@ -3183,7 +3183,7 @@
         </p:nvSpPr>
         <p:spPr>
           <a:xfrm>
-            <a:off x="1188720" y="256032"/>
+            <a:off x="1188720" y="192024"/>
             <a:ext cx="7498079" cy="411480"/>
           </a:xfrm>
           <a:prstGeom prst="rect">
@@ -3218,7 +3218,7 @@
         </p:nvSpPr>
         <p:spPr>
           <a:xfrm>
-            <a:off x="1188720" y="658368"/>
+            <a:off x="1188720" y="566928"/>
             <a:ext cx="7498079" cy="256032"/>
           </a:xfrm>
           <a:prstGeom prst="rect">
@@ -3234,13 +3234,13 @@
           <a:p>
             <a:pPr algn="l"/>
             <a:r>
-              <a:rPr sz="1100" b="0" i="1">
+              <a:rPr sz="1000" b="0" i="1">
                 <a:solidFill>
                   <a:srgbClr val="6B7A88"/>
                 </a:solidFill>
                 <a:latin typeface="Calibri"/>
               </a:rPr>
-              <a:t>Como conseguimos ~1400× mais iterações por segundo sem sair do Python</a:t>
+              <a:t>From Python to native speed — ~1400× more state visits per second, without leaving Python</a:t>
             </a:r>
           </a:p>
         </p:txBody>
@@ -3253,7 +3253,7 @@
         </p:nvSpPr>
         <p:spPr>
           <a:xfrm>
-            <a:off x="457200" y="960120"/>
+            <a:off x="457200" y="886968"/>
             <a:ext cx="8229600" cy="13716"/>
           </a:xfrm>
           <a:prstGeom prst="rect">
@@ -3297,8 +3297,8 @@
         </p:nvSpPr>
         <p:spPr>
           <a:xfrm>
-            <a:off x="457200" y="1143000"/>
-            <a:ext cx="4023360" cy="2194560"/>
+            <a:off x="457200" y="1005840"/>
+            <a:ext cx="4023360" cy="2057400"/>
           </a:xfrm>
           <a:prstGeom prst="rect">
             <a:avLst/>
@@ -3341,7 +3341,7 @@
         </p:nvSpPr>
         <p:spPr>
           <a:xfrm>
-            <a:off x="457200" y="1143000"/>
+            <a:off x="457200" y="1005840"/>
             <a:ext cx="4023360" cy="91440"/>
           </a:xfrm>
           <a:prstGeom prst="rect">
@@ -3385,8 +3385,8 @@
         </p:nvSpPr>
         <p:spPr>
           <a:xfrm>
-            <a:off x="594360" y="1307592"/>
-            <a:ext cx="3749039" cy="365760"/>
+            <a:off x="594360" y="1152144"/>
+            <a:ext cx="3749039" cy="292608"/>
           </a:xfrm>
           <a:prstGeom prst="rect">
             <a:avLst/>
@@ -3401,7 +3401,7 @@
           <a:p>
             <a:pPr algn="l"/>
             <a:r>
-              <a:rPr sz="1600" b="1" i="0">
+              <a:rPr sz="1500" b="1" i="0">
                 <a:solidFill>
                   <a:srgbClr val="1C7293"/>
                 </a:solidFill>
@@ -3420,8 +3420,8 @@
         </p:nvSpPr>
         <p:spPr>
           <a:xfrm>
-            <a:off x="594360" y="1645920"/>
-            <a:ext cx="3749039" cy="274320"/>
+            <a:off x="594360" y="1444752"/>
+            <a:ext cx="3749039" cy="219456"/>
           </a:xfrm>
           <a:prstGeom prst="rect">
             <a:avLst/>
@@ -3436,13 +3436,13 @@
           <a:p>
             <a:pPr algn="l"/>
             <a:r>
-              <a:rPr sz="1000" b="0" i="1">
+              <a:rPr sz="900" b="0" i="1">
                 <a:solidFill>
                   <a:srgbClr val="6B7A88"/>
                 </a:solidFill>
                 <a:latin typeface="Calibri"/>
               </a:rPr>
-              <a:t>Compilação @njit  ·  Python → LLVM</a:t>
+              <a:t>@njit compiles Python → native via LLVM</a:t>
             </a:r>
           </a:p>
         </p:txBody>
@@ -3455,8 +3455,8 @@
         </p:nvSpPr>
         <p:spPr>
           <a:xfrm>
-            <a:off x="594360" y="1965960"/>
-            <a:ext cx="3749039" cy="1325880"/>
+            <a:off x="594360" y="1719072"/>
+            <a:ext cx="3749039" cy="1280160"/>
           </a:xfrm>
           <a:prstGeom prst="rect">
             <a:avLst/>
@@ -3471,11 +3471,11 @@
           <a:p>
             <a:pPr algn="l">
               <a:spcAft>
-                <a:spcPts val="500"/>
+                <a:spcPts val="400"/>
               </a:spcAft>
             </a:pPr>
             <a:r>
-              <a:rPr sz="1100" b="1">
+              <a:rPr sz="1000" b="1">
                 <a:solidFill>
                   <a:srgbClr val="1C7293"/>
                 </a:solidFill>
@@ -3484,23 +3484,23 @@
               <a:t>•  </a:t>
             </a:r>
             <a:r>
-              <a:rPr sz="1100">
+              <a:rPr sz="1000">
                 <a:solidFill>
                   <a:srgbClr val="334455"/>
                 </a:solidFill>
                 <a:latin typeface="Calibri"/>
               </a:rPr>
-              <a:t>Decorador @njit(cache=True) nos hot loops (select · expand · simulate · backprop).</a:t>
+              <a:t>Decorator on the four MCTS hot loops — select · expand · simulate · backprop.</a:t>
             </a:r>
           </a:p>
           <a:p>
             <a:pPr algn="l">
               <a:spcAft>
-                <a:spcPts val="500"/>
+                <a:spcPts val="400"/>
               </a:spcAft>
             </a:pPr>
             <a:r>
-              <a:rPr sz="1100" b="1">
+              <a:rPr sz="1000" b="1">
                 <a:solidFill>
                   <a:srgbClr val="1C7293"/>
                 </a:solidFill>
@@ -3509,23 +3509,23 @@
               <a:t>•  </a:t>
             </a:r>
             <a:r>
-              <a:rPr sz="1100">
+              <a:rPr sz="1000">
                 <a:solidFill>
                   <a:srgbClr val="334455"/>
                 </a:solidFill>
                 <a:latin typeface="Calibri"/>
               </a:rPr>
-              <a:t>Mantém Python como linguagem principal — sem cadeia de build C/Cython.</a:t>
+              <a:t>@njit(cache=True) persists compiled bytecode across runs; explicit warmup() pays the JIT cost up front.</a:t>
             </a:r>
           </a:p>
           <a:p>
             <a:pPr algn="l">
               <a:spcAft>
-                <a:spcPts val="500"/>
+                <a:spcPts val="400"/>
               </a:spcAft>
             </a:pPr>
             <a:r>
-              <a:rPr sz="1100" b="1">
+              <a:rPr sz="1000" b="1">
                 <a:solidFill>
                   <a:srgbClr val="1C7293"/>
                 </a:solidFill>
@@ -3534,13 +3534,38 @@
               <a:t>•  </a:t>
             </a:r>
             <a:r>
-              <a:rPr sz="1100">
+              <a:rPr sz="1000">
                 <a:solidFill>
                   <a:srgbClr val="334455"/>
                 </a:solidFill>
                 <a:latin typeface="Calibri"/>
               </a:rPr>
-              <a:t>warmup() explícito antes de benchmarks: tira o custo da 1ª compilação.</a:t>
+              <a:t>All operations on primitive types (int / float / numpy arrays) — no Python object access inside the kernel.</a:t>
+            </a:r>
+          </a:p>
+          <a:p>
+            <a:pPr algn="l">
+              <a:spcAft>
+                <a:spcPts val="400"/>
+              </a:spcAft>
+            </a:pPr>
+            <a:r>
+              <a:rPr sz="1000" b="1">
+                <a:solidFill>
+                  <a:srgbClr val="1C7293"/>
+                </a:solidFill>
+                <a:latin typeface="Calibri"/>
+              </a:rPr>
+              <a:t>•  </a:t>
+            </a:r>
+            <a:r>
+              <a:rPr sz="1000">
+                <a:solidFill>
+                  <a:srgbClr val="334455"/>
+                </a:solidFill>
+                <a:latin typeface="Calibri"/>
+              </a:rPr>
+              <a:t>Chosen over Cython / C extensions: same ~95% of the speed-up, zero extra build chain.</a:t>
             </a:r>
           </a:p>
         </p:txBody>
@@ -3553,8 +3578,8 @@
         </p:nvSpPr>
         <p:spPr>
           <a:xfrm>
-            <a:off x="4663440" y="1143000"/>
-            <a:ext cx="4023360" cy="2194560"/>
+            <a:off x="4663440" y="1005840"/>
+            <a:ext cx="4023360" cy="2057400"/>
           </a:xfrm>
           <a:prstGeom prst="rect">
             <a:avLst/>
@@ -3597,7 +3622,7 @@
         </p:nvSpPr>
         <p:spPr>
           <a:xfrm>
-            <a:off x="4663440" y="1143000"/>
+            <a:off x="4663440" y="1005840"/>
             <a:ext cx="4023360" cy="91440"/>
           </a:xfrm>
           <a:prstGeom prst="rect">
@@ -3641,8 +3666,8 @@
         </p:nvSpPr>
         <p:spPr>
           <a:xfrm>
-            <a:off x="4800600" y="1307592"/>
-            <a:ext cx="3749039" cy="365760"/>
+            <a:off x="4800600" y="1152144"/>
+            <a:ext cx="3749039" cy="292608"/>
           </a:xfrm>
           <a:prstGeom prst="rect">
             <a:avLst/>
@@ -3657,7 +3682,7 @@
           <a:p>
             <a:pPr algn="l"/>
             <a:r>
-              <a:rPr sz="1600" b="1" i="0">
+              <a:rPr sz="1500" b="1" i="0">
                 <a:solidFill>
                   <a:srgbClr val="065A82"/>
                 </a:solidFill>
@@ -3676,8 +3701,8 @@
         </p:nvSpPr>
         <p:spPr>
           <a:xfrm>
-            <a:off x="4800600" y="1645920"/>
-            <a:ext cx="3749039" cy="274320"/>
+            <a:off x="4800600" y="1444752"/>
+            <a:ext cx="3749039" cy="219456"/>
           </a:xfrm>
           <a:prstGeom prst="rect">
             <a:avLst/>
@@ -3692,13 +3717,13 @@
           <a:p>
             <a:pPr algn="l"/>
             <a:r>
-              <a:rPr sz="1000" b="0" i="1">
+              <a:rPr sz="900" b="0" i="1">
                 <a:solidFill>
                   <a:srgbClr val="6B7A88"/>
                 </a:solidFill>
                 <a:latin typeface="Calibri"/>
               </a:rPr>
-              <a:t>Árvore em arrays NumPy pré-alocados</a:t>
+              <a:t>Whole tree as pre-allocated NumPy arrays</a:t>
             </a:r>
           </a:p>
         </p:txBody>
@@ -3711,8 +3736,8 @@
         </p:nvSpPr>
         <p:spPr>
           <a:xfrm>
-            <a:off x="4800600" y="1965960"/>
-            <a:ext cx="3749039" cy="1325880"/>
+            <a:off x="4800600" y="1719072"/>
+            <a:ext cx="3749039" cy="1280160"/>
           </a:xfrm>
           <a:prstGeom prst="rect">
             <a:avLst/>
@@ -3727,11 +3752,11 @@
           <a:p>
             <a:pPr algn="l">
               <a:spcAft>
-                <a:spcPts val="500"/>
+                <a:spcPts val="400"/>
               </a:spcAft>
             </a:pPr>
             <a:r>
-              <a:rPr sz="1100" b="1">
+              <a:rPr sz="1000" b="1">
                 <a:solidFill>
                   <a:srgbClr val="F4A341"/>
                 </a:solidFill>
@@ -3740,23 +3765,23 @@
               <a:t>•  </a:t>
             </a:r>
             <a:r>
-              <a:rPr sz="1100">
+              <a:rPr sz="1000">
                 <a:solidFill>
                   <a:srgbClr val="334455"/>
                 </a:solidFill>
                 <a:latin typeface="Calibri"/>
               </a:rPr>
-              <a:t>Sem objectos Python no caminho crítico — nós = índices inteiros em arrays planos.</a:t>
+              <a:t>Nodes are integer indices into fixed-size arrays (visits · value · parent · children · status).</a:t>
             </a:r>
           </a:p>
           <a:p>
             <a:pPr algn="l">
               <a:spcAft>
-                <a:spcPts val="500"/>
+                <a:spcPts val="400"/>
               </a:spcAft>
             </a:pPr>
             <a:r>
-              <a:rPr sz="1100" b="1">
+              <a:rPr sz="1000" b="1">
                 <a:solidFill>
                   <a:srgbClr val="F4A341"/>
                 </a:solidFill>
@@ -3765,23 +3790,23 @@
               <a:t>•  </a:t>
             </a:r>
             <a:r>
-              <a:rPr sz="1100">
+              <a:rPr sz="1000">
                 <a:solidFill>
                   <a:srgbClr val="334455"/>
                 </a:solidFill>
                 <a:latin typeface="Calibri"/>
               </a:rPr>
-              <a:t>Cache-friendly, vetorizável, sem overhead do garbage collector.</a:t>
+              <a:t>Memory layout is contiguous → cache-friendly; no GC pressure, no Python object dispatch.</a:t>
             </a:r>
           </a:p>
           <a:p>
             <a:pPr algn="l">
               <a:spcAft>
-                <a:spcPts val="500"/>
+                <a:spcPts val="400"/>
               </a:spcAft>
             </a:pPr>
             <a:r>
-              <a:rPr sz="1100" b="1">
+              <a:rPr sz="1000" b="1">
                 <a:solidFill>
                   <a:srgbClr val="F4A341"/>
                 </a:solidFill>
@@ -3790,13 +3815,38 @@
               <a:t>•  </a:t>
             </a:r>
             <a:r>
-              <a:rPr sz="1100">
+              <a:rPr sz="1000">
                 <a:solidFill>
                   <a:srgbClr val="334455"/>
                 </a:solidFill>
                 <a:latin typeface="Calibri"/>
               </a:rPr>
-              <a:t>Tree reuse via BFS compaction: sub-árvore reindexada para slots 0..k−1 entre turnos.</a:t>
+              <a:t>Tree reuse: BFS compaction re-indexes the surviving subtree to slots 0..k−1 between turns.</a:t>
+            </a:r>
+          </a:p>
+          <a:p>
+            <a:pPr algn="l">
+              <a:spcAft>
+                <a:spcPts val="400"/>
+              </a:spcAft>
+            </a:pPr>
+            <a:r>
+              <a:rPr sz="1000" b="1">
+                <a:solidFill>
+                  <a:srgbClr val="F4A341"/>
+                </a:solidFill>
+                <a:latin typeface="Calibri"/>
+              </a:rPr>
+              <a:t>•  </a:t>
+            </a:r>
+            <a:r>
+              <a:rPr sz="1000">
+                <a:solidFill>
+                  <a:srgbClr val="334455"/>
+                </a:solidFill>
+                <a:latin typeface="Calibri"/>
+              </a:rPr>
+              <a:t>Visit budget compounds — each turn inherits ≈12% of the previous turn's search effort.</a:t>
             </a:r>
           </a:p>
         </p:txBody>
@@ -3809,8 +3859,8 @@
         </p:nvSpPr>
         <p:spPr>
           <a:xfrm>
-            <a:off x="457200" y="3520440"/>
-            <a:ext cx="1508760" cy="192024"/>
+            <a:off x="457200" y="3246120"/>
+            <a:ext cx="1600200" cy="201168"/>
           </a:xfrm>
           <a:prstGeom prst="rect">
             <a:avLst/>
@@ -3838,14 +3888,49 @@
       </p:sp>
       <p:sp>
         <p:nvSpPr>
-          <p:cNvPr id="18" name="Rectangle 17"/>
+          <p:cNvPr id="18" name="TextBox 17"/>
+          <p:cNvSpPr txBox="1"/>
+          <p:nvPr/>
+        </p:nvSpPr>
+        <p:spPr>
+          <a:xfrm>
+            <a:off x="2103120" y="3246120"/>
+            <a:ext cx="1280160" cy="201168"/>
+          </a:xfrm>
+          <a:prstGeom prst="rect">
+            <a:avLst/>
+          </a:prstGeom>
+          <a:noFill/>
+        </p:spPr>
+        <p:txBody>
+          <a:bodyPr wrap="square" lIns="18288" rIns="18288" tIns="9144" bIns="9144" anchor="ctr">
+            <a:spAutoFit/>
+          </a:bodyPr>
+          <a:lstStyle/>
+          <a:p>
+            <a:pPr algn="l"/>
+            <a:r>
+              <a:rPr sz="800" b="0" i="1">
+                <a:solidFill>
+                  <a:srgbClr val="6B7A88"/>
+                </a:solidFill>
+                <a:latin typeface="Calibri"/>
+              </a:rPr>
+              <a:t>Python baseline</a:t>
+            </a:r>
+          </a:p>
+        </p:txBody>
+      </p:sp>
+      <p:sp>
+        <p:nvSpPr>
+          <p:cNvPr id="19" name="Rectangle 18"/>
           <p:cNvSpPr/>
           <p:nvPr/>
         </p:nvSpPr>
         <p:spPr>
           <a:xfrm>
-            <a:off x="2057400" y="3520440"/>
-            <a:ext cx="1778944" cy="192024"/>
+            <a:off x="3428999" y="3246120"/>
+            <a:ext cx="1321501" cy="201168"/>
           </a:xfrm>
           <a:prstGeom prst="rect">
             <a:avLst/>
@@ -3882,14 +3967,14 @@
       </p:sp>
       <p:sp>
         <p:nvSpPr>
-          <p:cNvPr id="19" name="TextBox 18"/>
+          <p:cNvPr id="20" name="TextBox 19"/>
           <p:cNvSpPr txBox="1"/>
           <p:nvPr/>
         </p:nvSpPr>
         <p:spPr>
           <a:xfrm>
-            <a:off x="3882064" y="3520440"/>
-            <a:ext cx="1005840" cy="192024"/>
+            <a:off x="4796221" y="3246120"/>
+            <a:ext cx="868680" cy="201168"/>
           </a:xfrm>
           <a:prstGeom prst="rect">
             <a:avLst/>
@@ -3910,21 +3995,21 @@
                 </a:solidFill>
                 <a:latin typeface="Calibri"/>
               </a:rPr>
-              <a:t>9 k iter/s</a:t>
-            </a:r>
-          </a:p>
-        </p:txBody>
-      </p:sp>
-      <p:sp>
-        <p:nvSpPr>
-          <p:cNvPr id="20" name="TextBox 19"/>
+              <a:t>9 k / s</a:t>
+            </a:r>
+          </a:p>
+        </p:txBody>
+      </p:sp>
+      <p:sp>
+        <p:nvSpPr>
+          <p:cNvPr id="21" name="TextBox 20"/>
           <p:cNvSpPr txBox="1"/>
           <p:nvPr/>
         </p:nvSpPr>
         <p:spPr>
           <a:xfrm>
-            <a:off x="457200" y="3767328"/>
-            <a:ext cx="1508760" cy="192024"/>
+            <a:off x="457200" y="3502152"/>
+            <a:ext cx="1600200" cy="201168"/>
           </a:xfrm>
           <a:prstGeom prst="rect">
             <a:avLst/>
@@ -3952,14 +4037,49 @@
       </p:sp>
       <p:sp>
         <p:nvSpPr>
-          <p:cNvPr id="21" name="Rectangle 20"/>
+          <p:cNvPr id="22" name="TextBox 21"/>
+          <p:cNvSpPr txBox="1"/>
+          <p:nvPr/>
+        </p:nvSpPr>
+        <p:spPr>
+          <a:xfrm>
+            <a:off x="2103120" y="3502152"/>
+            <a:ext cx="1280160" cy="201168"/>
+          </a:xfrm>
+          <a:prstGeom prst="rect">
+            <a:avLst/>
+          </a:prstGeom>
+          <a:noFill/>
+        </p:spPr>
+        <p:txBody>
+          <a:bodyPr wrap="square" lIns="18288" rIns="18288" tIns="9144" bIns="9144" anchor="ctr">
+            <a:spAutoFit/>
+          </a:bodyPr>
+          <a:lstStyle/>
+          <a:p>
+            <a:pPr algn="l"/>
+            <a:r>
+              <a:rPr sz="800" b="0" i="1">
+                <a:solidFill>
+                  <a:srgbClr val="6B7A88"/>
+                </a:solidFill>
+                <a:latin typeface="Calibri"/>
+              </a:rPr>
+              <a:t>Objects + JIT</a:t>
+            </a:r>
+          </a:p>
+        </p:txBody>
+      </p:sp>
+      <p:sp>
+        <p:nvSpPr>
+          <p:cNvPr id="23" name="Rectangle 22"/>
           <p:cNvSpPr/>
           <p:nvPr/>
         </p:nvSpPr>
         <p:spPr>
           <a:xfrm>
-            <a:off x="2057400" y="3767328"/>
-            <a:ext cx="2113962" cy="192024"/>
+            <a:off x="3428999" y="3502152"/>
+            <a:ext cx="1570372" cy="201168"/>
           </a:xfrm>
           <a:prstGeom prst="rect">
             <a:avLst/>
@@ -3996,14 +4116,14 @@
       </p:sp>
       <p:sp>
         <p:nvSpPr>
-          <p:cNvPr id="22" name="TextBox 21"/>
+          <p:cNvPr id="24" name="TextBox 23"/>
           <p:cNvSpPr txBox="1"/>
           <p:nvPr/>
         </p:nvSpPr>
         <p:spPr>
           <a:xfrm>
-            <a:off x="4217082" y="3767328"/>
-            <a:ext cx="1005840" cy="192024"/>
+            <a:off x="5045092" y="3502152"/>
+            <a:ext cx="868680" cy="201168"/>
           </a:xfrm>
           <a:prstGeom prst="rect">
             <a:avLst/>
@@ -4024,21 +4144,21 @@
                 </a:solidFill>
                 <a:latin typeface="Calibri"/>
               </a:rPr>
-              <a:t>50 k iter/s</a:t>
-            </a:r>
-          </a:p>
-        </p:txBody>
-      </p:sp>
-      <p:sp>
-        <p:nvSpPr>
-          <p:cNvPr id="23" name="TextBox 22"/>
+              <a:t>50 k / s</a:t>
+            </a:r>
+          </a:p>
+        </p:txBody>
+      </p:sp>
+      <p:sp>
+        <p:nvSpPr>
+          <p:cNvPr id="25" name="TextBox 24"/>
           <p:cNvSpPr txBox="1"/>
           <p:nvPr/>
         </p:nvSpPr>
         <p:spPr>
           <a:xfrm>
-            <a:off x="457200" y="4014216"/>
-            <a:ext cx="1508760" cy="192024"/>
+            <a:off x="457200" y="3758183"/>
+            <a:ext cx="1600200" cy="201168"/>
           </a:xfrm>
           <a:prstGeom prst="rect">
             <a:avLst/>
@@ -4066,14 +4186,49 @@
       </p:sp>
       <p:sp>
         <p:nvSpPr>
-          <p:cNvPr id="24" name="Rectangle 23"/>
+          <p:cNvPr id="26" name="TextBox 25"/>
+          <p:cNvSpPr txBox="1"/>
+          <p:nvPr/>
+        </p:nvSpPr>
+        <p:spPr>
+          <a:xfrm>
+            <a:off x="2103120" y="3758183"/>
+            <a:ext cx="1280160" cy="201168"/>
+          </a:xfrm>
+          <a:prstGeom prst="rect">
+            <a:avLst/>
+          </a:prstGeom>
+          <a:noFill/>
+        </p:spPr>
+        <p:txBody>
+          <a:bodyPr wrap="square" lIns="18288" rIns="18288" tIns="9144" bIns="9144" anchor="ctr">
+            <a:spAutoFit/>
+          </a:bodyPr>
+          <a:lstStyle/>
+          <a:p>
+            <a:pPr algn="l"/>
+            <a:r>
+              <a:rPr sz="800" b="0" i="1">
+                <a:solidFill>
+                  <a:srgbClr val="6B7A88"/>
+                </a:solidFill>
+                <a:latin typeface="Calibri"/>
+              </a:rPr>
+              <a:t>Arrays + JIT</a:t>
+            </a:r>
+          </a:p>
+        </p:txBody>
+      </p:sp>
+      <p:sp>
+        <p:nvSpPr>
+          <p:cNvPr id="27" name="Rectangle 26"/>
           <p:cNvSpPr/>
           <p:nvPr/>
         </p:nvSpPr>
         <p:spPr>
           <a:xfrm>
-            <a:off x="2057400" y="4014216"/>
-            <a:ext cx="2363139" cy="192024"/>
+            <a:off x="3428999" y="3758183"/>
+            <a:ext cx="1755474" cy="201168"/>
           </a:xfrm>
           <a:prstGeom prst="rect">
             <a:avLst/>
@@ -4110,14 +4265,14 @@
       </p:sp>
       <p:sp>
         <p:nvSpPr>
-          <p:cNvPr id="25" name="TextBox 24"/>
+          <p:cNvPr id="28" name="TextBox 27"/>
           <p:cNvSpPr txBox="1"/>
           <p:nvPr/>
         </p:nvSpPr>
         <p:spPr>
           <a:xfrm>
-            <a:off x="4466259" y="4014216"/>
-            <a:ext cx="1005840" cy="192024"/>
+            <a:off x="5230194" y="3758183"/>
+            <a:ext cx="868680" cy="201168"/>
           </a:xfrm>
           <a:prstGeom prst="rect">
             <a:avLst/>
@@ -4138,21 +4293,21 @@
                 </a:solidFill>
                 <a:latin typeface="Calibri"/>
               </a:rPr>
-              <a:t>179 k iter/s</a:t>
-            </a:r>
-          </a:p>
-        </p:txBody>
-      </p:sp>
-      <p:sp>
-        <p:nvSpPr>
-          <p:cNvPr id="26" name="TextBox 25"/>
+              <a:t>179 k / s</a:t>
+            </a:r>
+          </a:p>
+        </p:txBody>
+      </p:sp>
+      <p:sp>
+        <p:nvSpPr>
+          <p:cNvPr id="29" name="TextBox 28"/>
           <p:cNvSpPr txBox="1"/>
           <p:nvPr/>
         </p:nvSpPr>
         <p:spPr>
           <a:xfrm>
-            <a:off x="457200" y="4261104"/>
-            <a:ext cx="1508760" cy="192024"/>
+            <a:off x="457200" y="4014215"/>
+            <a:ext cx="1600200" cy="201168"/>
           </a:xfrm>
           <a:prstGeom prst="rect">
             <a:avLst/>
@@ -4173,21 +4328,56 @@
                 </a:solidFill>
                 <a:latin typeface="Calibri"/>
               </a:rPr>
-              <a:t>ReuseFlat (peak)</a:t>
-            </a:r>
-          </a:p>
-        </p:txBody>
-      </p:sp>
-      <p:sp>
-        <p:nvSpPr>
-          <p:cNvPr id="27" name="Rectangle 26"/>
+              <a:t>ReuseFlat (effective)</a:t>
+            </a:r>
+          </a:p>
+        </p:txBody>
+      </p:sp>
+      <p:sp>
+        <p:nvSpPr>
+          <p:cNvPr id="30" name="TextBox 29"/>
+          <p:cNvSpPr txBox="1"/>
+          <p:nvPr/>
+        </p:nvSpPr>
+        <p:spPr>
+          <a:xfrm>
+            <a:off x="2103120" y="4014215"/>
+            <a:ext cx="1280160" cy="201168"/>
+          </a:xfrm>
+          <a:prstGeom prst="rect">
+            <a:avLst/>
+          </a:prstGeom>
+          <a:noFill/>
+        </p:spPr>
+        <p:txBody>
+          <a:bodyPr wrap="square" lIns="18288" rIns="18288" tIns="9144" bIns="9144" anchor="ctr">
+            <a:spAutoFit/>
+          </a:bodyPr>
+          <a:lstStyle/>
+          <a:p>
+            <a:pPr algn="l"/>
+            <a:r>
+              <a:rPr sz="800" b="0" i="1">
+                <a:solidFill>
+                  <a:srgbClr val="6B7A88"/>
+                </a:solidFill>
+                <a:latin typeface="Calibri"/>
+              </a:rPr>
+              <a:t>Arrays + JIT + reuse</a:t>
+            </a:r>
+          </a:p>
+        </p:txBody>
+      </p:sp>
+      <p:sp>
+        <p:nvSpPr>
+          <p:cNvPr id="31" name="Rectangle 30"/>
           <p:cNvSpPr/>
           <p:nvPr/>
         </p:nvSpPr>
         <p:spPr>
           <a:xfrm>
-            <a:off x="2057400" y="4261104"/>
-            <a:ext cx="3200400" cy="192024"/>
+            <a:off x="3428999" y="4014215"/>
+            <a:ext cx="2377440" cy="201168"/>
           </a:xfrm>
           <a:prstGeom prst="rect">
             <a:avLst/>
@@ -4224,14 +4414,14 @@
       </p:sp>
       <p:sp>
         <p:nvSpPr>
-          <p:cNvPr id="28" name="TextBox 27"/>
+          <p:cNvPr id="32" name="TextBox 31"/>
           <p:cNvSpPr txBox="1"/>
           <p:nvPr/>
         </p:nvSpPr>
         <p:spPr>
           <a:xfrm>
-            <a:off x="5303520" y="4261104"/>
-            <a:ext cx="1005840" cy="192024"/>
+            <a:off x="5852159" y="4014215"/>
+            <a:ext cx="868680" cy="201168"/>
           </a:xfrm>
           <a:prstGeom prst="rect">
             <a:avLst/>
@@ -4252,21 +4442,21 @@
                 </a:solidFill>
                 <a:latin typeface="Calibri"/>
               </a:rPr>
-              <a:t>13 M iter/s</a:t>
-            </a:r>
-          </a:p>
-        </p:txBody>
-      </p:sp>
-      <p:sp>
-        <p:nvSpPr>
-          <p:cNvPr id="29" name="TextBox 28"/>
+              <a:t>13 M / s</a:t>
+            </a:r>
+          </a:p>
+        </p:txBody>
+      </p:sp>
+      <p:sp>
+        <p:nvSpPr>
+          <p:cNvPr id="33" name="TextBox 32"/>
           <p:cNvSpPr txBox="1"/>
           <p:nvPr/>
         </p:nvSpPr>
         <p:spPr>
           <a:xfrm>
-            <a:off x="457200" y="4553712"/>
-            <a:ext cx="5257800" cy="182880"/>
+            <a:off x="457200" y="4306824"/>
+            <a:ext cx="6263640" cy="182880"/>
           </a:xfrm>
           <a:prstGeom prst="rect">
             <a:avLst/>
@@ -4287,21 +4477,21 @@
                 </a:solidFill>
                 <a:latin typeface="Calibri"/>
               </a:rPr>
-              <a:t>log-scale  ·  unidades: iterações por segundo</a:t>
-            </a:r>
-          </a:p>
-        </p:txBody>
-      </p:sp>
-      <p:sp>
-        <p:nvSpPr>
-          <p:cNvPr id="30" name="Rectangle 29"/>
+              <a:t>log scale  ·  state visits per second of wall-clock</a:t>
+            </a:r>
+          </a:p>
+        </p:txBody>
+      </p:sp>
+      <p:sp>
+        <p:nvSpPr>
+          <p:cNvPr id="34" name="Rectangle 33"/>
           <p:cNvSpPr/>
           <p:nvPr/>
         </p:nvSpPr>
         <p:spPr>
           <a:xfrm>
-            <a:off x="6675120" y="3520440"/>
-            <a:ext cx="2011680" cy="1097280"/>
+            <a:off x="7178040" y="3246120"/>
+            <a:ext cx="1508760" cy="1097280"/>
           </a:xfrm>
           <a:prstGeom prst="rect">
             <a:avLst/>
@@ -4338,14 +4528,14 @@
       </p:sp>
       <p:sp>
         <p:nvSpPr>
-          <p:cNvPr id="31" name="TextBox 30"/>
+          <p:cNvPr id="35" name="TextBox 34"/>
           <p:cNvSpPr txBox="1"/>
           <p:nvPr/>
         </p:nvSpPr>
         <p:spPr>
           <a:xfrm>
-            <a:off x="6675120" y="3566160"/>
-            <a:ext cx="2011680" cy="274320"/>
+            <a:off x="7178040" y="3291840"/>
+            <a:ext cx="1508760" cy="228600"/>
           </a:xfrm>
           <a:prstGeom prst="rect">
             <a:avLst/>
@@ -4360,7 +4550,7 @@
           <a:p>
             <a:pPr algn="ctr"/>
             <a:r>
-              <a:rPr sz="1000" b="1" i="0">
+              <a:rPr sz="900" b="1" i="0">
                 <a:solidFill>
                   <a:srgbClr val="F4A341"/>
                 </a:solidFill>
@@ -4373,14 +4563,14 @@
       </p:sp>
       <p:sp>
         <p:nvSpPr>
-          <p:cNvPr id="32" name="TextBox 31"/>
+          <p:cNvPr id="36" name="TextBox 35"/>
           <p:cNvSpPr txBox="1"/>
           <p:nvPr/>
         </p:nvSpPr>
         <p:spPr>
           <a:xfrm>
-            <a:off x="6675120" y="3840480"/>
-            <a:ext cx="2011680" cy="594360"/>
+            <a:off x="7178040" y="3520440"/>
+            <a:ext cx="1508760" cy="548640"/>
           </a:xfrm>
           <a:prstGeom prst="rect">
             <a:avLst/>
@@ -4395,7 +4585,7 @@
           <a:p>
             <a:pPr algn="ctr"/>
             <a:r>
-              <a:rPr sz="3600" b="1" i="0">
+              <a:rPr sz="2800" b="1" i="0">
                 <a:solidFill>
                   <a:srgbClr val="FFFFFF"/>
                 </a:solidFill>
@@ -4408,14 +4598,14 @@
       </p:sp>
       <p:sp>
         <p:nvSpPr>
-          <p:cNvPr id="33" name="TextBox 32"/>
+          <p:cNvPr id="37" name="TextBox 36"/>
           <p:cNvSpPr txBox="1"/>
           <p:nvPr/>
         </p:nvSpPr>
         <p:spPr>
           <a:xfrm>
-            <a:off x="6675120" y="4407408"/>
-            <a:ext cx="2011680" cy="201168"/>
+            <a:off x="7178040" y="4069080"/>
+            <a:ext cx="1508760" cy="228600"/>
           </a:xfrm>
           <a:prstGeom prst="rect">
             <a:avLst/>
@@ -4430,27 +4620,115 @@
           <a:p>
             <a:pPr algn="ctr"/>
             <a:r>
-              <a:rPr sz="900" b="0" i="1">
+              <a:rPr sz="800" b="0" i="1">
                 <a:solidFill>
                   <a:srgbClr val="5AA4B8"/>
                 </a:solidFill>
                 <a:latin typeface="Calibri"/>
               </a:rPr>
-              <a:t>vs Python puro</a:t>
-            </a:r>
-          </a:p>
-        </p:txBody>
-      </p:sp>
-      <p:sp>
-        <p:nvSpPr>
-          <p:cNvPr id="34" name="TextBox 33"/>
+              <a:t>vs pure Python</a:t>
+            </a:r>
+          </a:p>
+        </p:txBody>
+      </p:sp>
+      <p:sp>
+        <p:nvSpPr>
+          <p:cNvPr id="38" name="Rectangle 37"/>
+          <p:cNvSpPr/>
+          <p:nvPr/>
+        </p:nvSpPr>
+        <p:spPr>
+          <a:xfrm>
+            <a:off x="457200" y="4526280"/>
+            <a:ext cx="5212080" cy="457200"/>
+          </a:xfrm>
+          <a:prstGeom prst="rect">
+            <a:avLst/>
+          </a:prstGeom>
+          <a:solidFill>
+            <a:srgbClr val="E6F1F5"/>
+          </a:solidFill>
+          <a:ln>
+            <a:noFill/>
+          </a:ln>
+          <a:effectLst/>
+        </p:spPr>
+        <p:style>
+          <a:lnRef idx="1">
+            <a:schemeClr val="accent1"/>
+          </a:lnRef>
+          <a:fillRef idx="3">
+            <a:schemeClr val="accent1"/>
+          </a:fillRef>
+          <a:effectRef idx="2">
+            <a:schemeClr val="accent1"/>
+          </a:effectRef>
+          <a:fontRef idx="minor">
+            <a:schemeClr val="lt1"/>
+          </a:fontRef>
+        </p:style>
+        <p:txBody>
+          <a:bodyPr rtlCol="0" anchor="ctr"/>
+          <a:lstStyle/>
+          <a:p>
+            <a:pPr algn="ctr"/>
+          </a:p>
+        </p:txBody>
+      </p:sp>
+      <p:sp>
+        <p:nvSpPr>
+          <p:cNvPr id="39" name="Rectangle 38"/>
+          <p:cNvSpPr/>
+          <p:nvPr/>
+        </p:nvSpPr>
+        <p:spPr>
+          <a:xfrm>
+            <a:off x="457200" y="4526280"/>
+            <a:ext cx="91440" cy="457200"/>
+          </a:xfrm>
+          <a:prstGeom prst="rect">
+            <a:avLst/>
+          </a:prstGeom>
+          <a:solidFill>
+            <a:srgbClr val="065A82"/>
+          </a:solidFill>
+          <a:ln>
+            <a:noFill/>
+          </a:ln>
+          <a:effectLst/>
+        </p:spPr>
+        <p:style>
+          <a:lnRef idx="1">
+            <a:schemeClr val="accent1"/>
+          </a:lnRef>
+          <a:fillRef idx="3">
+            <a:schemeClr val="accent1"/>
+          </a:fillRef>
+          <a:effectRef idx="2">
+            <a:schemeClr val="accent1"/>
+          </a:effectRef>
+          <a:fontRef idx="minor">
+            <a:schemeClr val="lt1"/>
+          </a:fontRef>
+        </p:style>
+        <p:txBody>
+          <a:bodyPr rtlCol="0" anchor="ctr"/>
+          <a:lstStyle/>
+          <a:p>
+            <a:pPr algn="ctr"/>
+          </a:p>
+        </p:txBody>
+      </p:sp>
+      <p:sp>
+        <p:nvSpPr>
+          <p:cNvPr id="40" name="TextBox 39"/>
           <p:cNvSpPr txBox="1"/>
           <p:nvPr/>
         </p:nvSpPr>
         <p:spPr>
           <a:xfrm>
-            <a:off x="457200" y="4754880"/>
-            <a:ext cx="8229600" cy="274320"/>
+            <a:off x="640080" y="4562856"/>
+            <a:ext cx="4937760" cy="201168"/>
           </a:xfrm>
           <a:prstGeom prst="rect">
             <a:avLst/>
@@ -4463,15 +4741,208 @@
           </a:bodyPr>
           <a:lstStyle/>
           <a:p>
-            <a:pPr algn="ctr"/>
-            <a:r>
-              <a:rPr sz="1000" b="0" i="1">
-                <a:solidFill>
-                  <a:srgbClr val="6B7A88"/>
+            <a:pPr algn="l"/>
+            <a:r>
+              <a:rPr sz="1000" b="1" i="0">
+                <a:solidFill>
+                  <a:srgbClr val="21295C"/>
                 </a:solidFill>
                 <a:latin typeface="Calibri"/>
               </a:rPr>
-              <a:t>Python legível em cima  ·  código nativo cache-friendly em baixo.</a:t>
+              <a:t>Raw kernel  vs  effective throughput</a:t>
+            </a:r>
+          </a:p>
+        </p:txBody>
+      </p:sp>
+      <p:sp>
+        <p:nvSpPr>
+          <p:cNvPr id="41" name="TextBox 40"/>
+          <p:cNvSpPr txBox="1"/>
+          <p:nvPr/>
+        </p:nvSpPr>
+        <p:spPr>
+          <a:xfrm>
+            <a:off x="640080" y="4754880"/>
+            <a:ext cx="4937760" cy="201168"/>
+          </a:xfrm>
+          <a:prstGeom prst="rect">
+            <a:avLst/>
+          </a:prstGeom>
+          <a:noFill/>
+        </p:spPr>
+        <p:txBody>
+          <a:bodyPr wrap="square" lIns="18288" rIns="18288" tIns="9144" bIns="9144" anchor="t">
+            <a:spAutoFit/>
+          </a:bodyPr>
+          <a:lstStyle/>
+          <a:p>
+            <a:pPr algn="l"/>
+            <a:r>
+              <a:rPr sz="900" b="0" i="1">
+                <a:solidFill>
+                  <a:srgbClr val="334455"/>
+                </a:solidFill>
+                <a:latin typeface="Calibri"/>
+              </a:rPr>
+              <a:t>Kernel sustains ~168 k iter/s alone; the 13 M figure counts inherited visits leveraged via tree reuse.</a:t>
+            </a:r>
+          </a:p>
+        </p:txBody>
+      </p:sp>
+      <p:sp>
+        <p:nvSpPr>
+          <p:cNvPr id="42" name="Rectangle 41"/>
+          <p:cNvSpPr/>
+          <p:nvPr/>
+        </p:nvSpPr>
+        <p:spPr>
+          <a:xfrm>
+            <a:off x="5760720" y="4526280"/>
+            <a:ext cx="2926080" cy="457200"/>
+          </a:xfrm>
+          <a:prstGeom prst="rect">
+            <a:avLst/>
+          </a:prstGeom>
+          <a:solidFill>
+            <a:srgbClr val="E6F1F5"/>
+          </a:solidFill>
+          <a:ln>
+            <a:noFill/>
+          </a:ln>
+          <a:effectLst/>
+        </p:spPr>
+        <p:style>
+          <a:lnRef idx="1">
+            <a:schemeClr val="accent1"/>
+          </a:lnRef>
+          <a:fillRef idx="3">
+            <a:schemeClr val="accent1"/>
+          </a:fillRef>
+          <a:effectRef idx="2">
+            <a:schemeClr val="accent1"/>
+          </a:effectRef>
+          <a:fontRef idx="minor">
+            <a:schemeClr val="lt1"/>
+          </a:fontRef>
+        </p:style>
+        <p:txBody>
+          <a:bodyPr rtlCol="0" anchor="ctr"/>
+          <a:lstStyle/>
+          <a:p>
+            <a:pPr algn="ctr"/>
+          </a:p>
+        </p:txBody>
+      </p:sp>
+      <p:sp>
+        <p:nvSpPr>
+          <p:cNvPr id="43" name="Rectangle 42"/>
+          <p:cNvSpPr/>
+          <p:nvPr/>
+        </p:nvSpPr>
+        <p:spPr>
+          <a:xfrm>
+            <a:off x="5760720" y="4526280"/>
+            <a:ext cx="91440" cy="457200"/>
+          </a:xfrm>
+          <a:prstGeom prst="rect">
+            <a:avLst/>
+          </a:prstGeom>
+          <a:solidFill>
+            <a:srgbClr val="2E8B57"/>
+          </a:solidFill>
+          <a:ln>
+            <a:noFill/>
+          </a:ln>
+          <a:effectLst/>
+        </p:spPr>
+        <p:style>
+          <a:lnRef idx="1">
+            <a:schemeClr val="accent1"/>
+          </a:lnRef>
+          <a:fillRef idx="3">
+            <a:schemeClr val="accent1"/>
+          </a:fillRef>
+          <a:effectRef idx="2">
+            <a:schemeClr val="accent1"/>
+          </a:effectRef>
+          <a:fontRef idx="minor">
+            <a:schemeClr val="lt1"/>
+          </a:fontRef>
+        </p:style>
+        <p:txBody>
+          <a:bodyPr rtlCol="0" anchor="ctr"/>
+          <a:lstStyle/>
+          <a:p>
+            <a:pPr algn="ctr"/>
+          </a:p>
+        </p:txBody>
+      </p:sp>
+      <p:sp>
+        <p:nvSpPr>
+          <p:cNvPr id="44" name="TextBox 43"/>
+          <p:cNvSpPr txBox="1"/>
+          <p:nvPr/>
+        </p:nvSpPr>
+        <p:spPr>
+          <a:xfrm>
+            <a:off x="5943600" y="4562856"/>
+            <a:ext cx="2697480" cy="201168"/>
+          </a:xfrm>
+          <a:prstGeom prst="rect">
+            <a:avLst/>
+          </a:prstGeom>
+          <a:noFill/>
+        </p:spPr>
+        <p:txBody>
+          <a:bodyPr wrap="square" lIns="18288" rIns="18288" tIns="9144" bIns="9144" anchor="t">
+            <a:spAutoFit/>
+          </a:bodyPr>
+          <a:lstStyle/>
+          <a:p>
+            <a:pPr algn="l"/>
+            <a:r>
+              <a:rPr sz="1000" b="1" i="0">
+                <a:solidFill>
+                  <a:srgbClr val="21295C"/>
+                </a:solidFill>
+                <a:latin typeface="Calibri"/>
+              </a:rPr>
+              <a:t>Practical impact</a:t>
+            </a:r>
+          </a:p>
+        </p:txBody>
+      </p:sp>
+      <p:sp>
+        <p:nvSpPr>
+          <p:cNvPr id="45" name="TextBox 44"/>
+          <p:cNvSpPr txBox="1"/>
+          <p:nvPr/>
+        </p:nvSpPr>
+        <p:spPr>
+          <a:xfrm>
+            <a:off x="5943600" y="4754880"/>
+            <a:ext cx="2697480" cy="201168"/>
+          </a:xfrm>
+          <a:prstGeom prst="rect">
+            <a:avLst/>
+          </a:prstGeom>
+          <a:noFill/>
+        </p:spPr>
+        <p:txBody>
+          <a:bodyPr wrap="square" lIns="18288" rIns="18288" tIns="9144" bIns="9144" anchor="t">
+            <a:spAutoFit/>
+          </a:bodyPr>
+          <a:lstStyle/>
+          <a:p>
+            <a:pPr algn="l"/>
+            <a:r>
+              <a:rPr sz="900" b="0" i="1">
+                <a:solidFill>
+                  <a:srgbClr val="334455"/>
+                </a:solidFill>
+                <a:latin typeface="Calibri"/>
+              </a:rPr>
+              <a:t>Competitive moves in ~50 ms  ·  real-time GUI play.</a:t>
             </a:r>
           </a:p>
         </p:txBody>

--- a/docs/numba_slide.pptx
+++ b/docs/numba_slide.pptx
@@ -3240,7 +3240,7 @@
                 </a:solidFill>
                 <a:latin typeface="Calibri"/>
               </a:rPr>
-              <a:t>From Python to native speed — ~1400× more state visits per second, without leaving Python</a:t>
+              <a:t>From Python to native speed — ~44× more state visits per second, without leaving Python</a:t>
             </a:r>
           </a:p>
         </p:txBody>
@@ -3930,7 +3930,7 @@
         <p:spPr>
           <a:xfrm>
             <a:off x="3428999" y="3246120"/>
-            <a:ext cx="1321501" cy="201168"/>
+            <a:ext cx="1646122" cy="201168"/>
           </a:xfrm>
           <a:prstGeom prst="rect">
             <a:avLst/>
@@ -3973,7 +3973,7 @@
         </p:nvSpPr>
         <p:spPr>
           <a:xfrm>
-            <a:off x="4796221" y="3246120"/>
+            <a:off x="5120842" y="3246120"/>
             <a:ext cx="868680" cy="201168"/>
           </a:xfrm>
           <a:prstGeom prst="rect">
@@ -3995,7 +3995,7 @@
                 </a:solidFill>
                 <a:latin typeface="Calibri"/>
               </a:rPr>
-              <a:t>9 k / s</a:t>
+              <a:t>5 k / s</a:t>
             </a:r>
           </a:p>
         </p:txBody>
@@ -4079,7 +4079,7 @@
         <p:spPr>
           <a:xfrm>
             <a:off x="3428999" y="3502152"/>
-            <a:ext cx="1570372" cy="201168"/>
+            <a:ext cx="1992376" cy="201168"/>
           </a:xfrm>
           <a:prstGeom prst="rect">
             <a:avLst/>
@@ -4122,7 +4122,7 @@
         </p:nvSpPr>
         <p:spPr>
           <a:xfrm>
-            <a:off x="5045092" y="3502152"/>
+            <a:off x="5467096" y="3502152"/>
             <a:ext cx="868680" cy="201168"/>
           </a:xfrm>
           <a:prstGeom prst="rect">
@@ -4144,7 +4144,7 @@
                 </a:solidFill>
                 <a:latin typeface="Calibri"/>
               </a:rPr>
-              <a:t>50 k / s</a:t>
+              <a:t>30 k / s</a:t>
             </a:r>
           </a:p>
         </p:txBody>
@@ -4228,7 +4228,7 @@
         <p:spPr>
           <a:xfrm>
             <a:off x="3428999" y="3758183"/>
-            <a:ext cx="1755474" cy="201168"/>
+            <a:ext cx="2377440" cy="201168"/>
           </a:xfrm>
           <a:prstGeom prst="rect">
             <a:avLst/>
@@ -4271,7 +4271,7 @@
         </p:nvSpPr>
         <p:spPr>
           <a:xfrm>
-            <a:off x="5230194" y="3758183"/>
+            <a:off x="5852159" y="3758183"/>
             <a:ext cx="868680" cy="201168"/>
           </a:xfrm>
           <a:prstGeom prst="rect">
@@ -4293,7 +4293,7 @@
                 </a:solidFill>
                 <a:latin typeface="Calibri"/>
               </a:rPr>
-              <a:t>179 k / s</a:t>
+              <a:t>220 k / s</a:t>
             </a:r>
           </a:p>
         </p:txBody>
@@ -4328,7 +4328,7 @@
                 </a:solidFill>
                 <a:latin typeface="Calibri"/>
               </a:rPr>
-              <a:t>ReuseFlat (effective)</a:t>
+              <a:t>ReuseFlat Solver</a:t>
             </a:r>
           </a:p>
         </p:txBody>
@@ -4442,7 +4442,7 @@
                 </a:solidFill>
                 <a:latin typeface="Calibri"/>
               </a:rPr>
-              <a:t>13 M / s</a:t>
+              <a:t>220 k / s</a:t>
             </a:r>
           </a:p>
         </p:txBody>
@@ -4585,13 +4585,13 @@
           <a:p>
             <a:pPr algn="ctr"/>
             <a:r>
-              <a:rPr sz="2800" b="1" i="0">
+              <a:rPr sz="3200" b="1" i="0">
                 <a:solidFill>
                   <a:srgbClr val="FFFFFF"/>
                 </a:solidFill>
                 <a:latin typeface="Cambria"/>
               </a:rPr>
-              <a:t>≈ 1400×</a:t>
+              <a:t>≈ 44×</a:t>
             </a:r>
           </a:p>
         </p:txBody>
@@ -4749,7 +4749,7 @@
                 </a:solidFill>
                 <a:latin typeface="Calibri"/>
               </a:rPr>
-              <a:t>Raw kernel  vs  effective throughput</a:t>
+              <a:t>What tree reuse really buys</a:t>
             </a:r>
           </a:p>
         </p:txBody>
@@ -4784,7 +4784,7 @@
                 </a:solidFill>
                 <a:latin typeface="Calibri"/>
               </a:rPr>
-              <a:t>Kernel sustains ~168 k iter/s alone; the 13 M figure counts inherited visits leveraged via tree reuse.</a:t>
+              <a:t>Raw iter/s ~ unchanged; reuse compounds search effort across turns (~12% inherited) — same kernel, deeper effective tree.</a:t>
             </a:r>
           </a:p>
         </p:txBody>
@@ -4907,7 +4907,7 @@
                 </a:solidFill>
                 <a:latin typeface="Calibri"/>
               </a:rPr>
-              <a:t>Practical impact</a:t>
+              <a:t>Solver early exit</a:t>
             </a:r>
           </a:p>
         </p:txBody>
@@ -4942,7 +4942,7 @@
                 </a:solidFill>
                 <a:latin typeface="Calibri"/>
               </a:rPr>
-              <a:t>Competitive moves in ~50 ms  ·  real-time GUI play.</a:t>
+              <a:t>Proven positions return in &lt; 1 ms via AND/OR propagation.</a:t>
             </a:r>
           </a:p>
         </p:txBody>

--- a/docs/numba_slide.pptx
+++ b/docs/numba_slide.pptx
@@ -3860,7 +3860,7 @@
         <p:spPr>
           <a:xfrm>
             <a:off x="457200" y="3246120"/>
-            <a:ext cx="1600200" cy="201168"/>
+            <a:ext cx="1600200" cy="274320"/>
           </a:xfrm>
           <a:prstGeom prst="rect">
             <a:avLst/>
@@ -3895,7 +3895,7 @@
         <p:spPr>
           <a:xfrm>
             <a:off x="2103120" y="3246120"/>
-            <a:ext cx="1280160" cy="201168"/>
+            <a:ext cx="1280160" cy="274320"/>
           </a:xfrm>
           <a:prstGeom prst="rect">
             <a:avLst/>
@@ -3930,7 +3930,7 @@
         <p:spPr>
           <a:xfrm>
             <a:off x="3428999" y="3246120"/>
-            <a:ext cx="1646122" cy="201168"/>
+            <a:ext cx="1646122" cy="274320"/>
           </a:xfrm>
           <a:prstGeom prst="rect">
             <a:avLst/>
@@ -3974,7 +3974,7 @@
         <p:spPr>
           <a:xfrm>
             <a:off x="5120842" y="3246120"/>
-            <a:ext cx="868680" cy="201168"/>
+            <a:ext cx="868680" cy="274320"/>
           </a:xfrm>
           <a:prstGeom prst="rect">
             <a:avLst/>
@@ -4008,8 +4008,8 @@
         </p:nvSpPr>
         <p:spPr>
           <a:xfrm>
-            <a:off x="457200" y="3502152"/>
-            <a:ext cx="1600200" cy="201168"/>
+            <a:off x="457200" y="3611879"/>
+            <a:ext cx="1600200" cy="274320"/>
           </a:xfrm>
           <a:prstGeom prst="rect">
             <a:avLst/>
@@ -4043,8 +4043,8 @@
         </p:nvSpPr>
         <p:spPr>
           <a:xfrm>
-            <a:off x="2103120" y="3502152"/>
-            <a:ext cx="1280160" cy="201168"/>
+            <a:off x="2103120" y="3611879"/>
+            <a:ext cx="1280160" cy="274320"/>
           </a:xfrm>
           <a:prstGeom prst="rect">
             <a:avLst/>
@@ -4078,8 +4078,8 @@
         </p:nvSpPr>
         <p:spPr>
           <a:xfrm>
-            <a:off x="3428999" y="3502152"/>
-            <a:ext cx="1992376" cy="201168"/>
+            <a:off x="3428999" y="3611879"/>
+            <a:ext cx="1992376" cy="274320"/>
           </a:xfrm>
           <a:prstGeom prst="rect">
             <a:avLst/>
@@ -4122,8 +4122,8 @@
         </p:nvSpPr>
         <p:spPr>
           <a:xfrm>
-            <a:off x="5467096" y="3502152"/>
-            <a:ext cx="868680" cy="201168"/>
+            <a:off x="5467096" y="3611879"/>
+            <a:ext cx="868680" cy="274320"/>
           </a:xfrm>
           <a:prstGeom prst="rect">
             <a:avLst/>
@@ -4157,8 +4157,8 @@
         </p:nvSpPr>
         <p:spPr>
           <a:xfrm>
-            <a:off x="457200" y="3758183"/>
-            <a:ext cx="1600200" cy="201168"/>
+            <a:off x="457200" y="3977639"/>
+            <a:ext cx="1600200" cy="274320"/>
           </a:xfrm>
           <a:prstGeom prst="rect">
             <a:avLst/>
@@ -4192,8 +4192,8 @@
         </p:nvSpPr>
         <p:spPr>
           <a:xfrm>
-            <a:off x="2103120" y="3758183"/>
-            <a:ext cx="1280160" cy="201168"/>
+            <a:off x="2103120" y="3977639"/>
+            <a:ext cx="1280160" cy="274320"/>
           </a:xfrm>
           <a:prstGeom prst="rect">
             <a:avLst/>
@@ -4227,8 +4227,8 @@
         </p:nvSpPr>
         <p:spPr>
           <a:xfrm>
-            <a:off x="3428999" y="3758183"/>
-            <a:ext cx="2377440" cy="201168"/>
+            <a:off x="3428999" y="3977639"/>
+            <a:ext cx="2377440" cy="274320"/>
           </a:xfrm>
           <a:prstGeom prst="rect">
             <a:avLst/>
@@ -4271,8 +4271,8 @@
         </p:nvSpPr>
         <p:spPr>
           <a:xfrm>
-            <a:off x="5852159" y="3758183"/>
-            <a:ext cx="868680" cy="201168"/>
+            <a:off x="5852159" y="3977639"/>
+            <a:ext cx="868680" cy="274320"/>
           </a:xfrm>
           <a:prstGeom prst="rect">
             <a:avLst/>
@@ -4306,8 +4306,8 @@
         </p:nvSpPr>
         <p:spPr>
           <a:xfrm>
-            <a:off x="457200" y="4014215"/>
-            <a:ext cx="1600200" cy="201168"/>
+            <a:off x="457200" y="4745736"/>
+            <a:ext cx="6263640" cy="182880"/>
           </a:xfrm>
           <a:prstGeom prst="rect">
             <a:avLst/>
@@ -4315,75 +4315,40 @@
           <a:noFill/>
         </p:spPr>
         <p:txBody>
-          <a:bodyPr wrap="square" lIns="18288" rIns="18288" tIns="9144" bIns="9144" anchor="ctr">
+          <a:bodyPr wrap="square" lIns="18288" rIns="18288" tIns="9144" bIns="9144" anchor="t">
             <a:spAutoFit/>
           </a:bodyPr>
           <a:lstStyle/>
           <a:p>
-            <a:pPr algn="r"/>
-            <a:r>
-              <a:rPr sz="1000" b="1" i="0">
-                <a:solidFill>
-                  <a:srgbClr val="121E3F"/>
+            <a:pPr algn="l"/>
+            <a:r>
+              <a:rPr sz="800" b="0" i="1">
+                <a:solidFill>
+                  <a:srgbClr val="6B7A88"/>
                 </a:solidFill>
                 <a:latin typeface="Calibri"/>
               </a:rPr>
-              <a:t>ReuseFlat Solver</a:t>
-            </a:r>
-          </a:p>
-        </p:txBody>
-      </p:sp>
-      <p:sp>
-        <p:nvSpPr>
-          <p:cNvPr id="30" name="TextBox 29"/>
-          <p:cNvSpPr txBox="1"/>
-          <p:nvPr/>
-        </p:nvSpPr>
-        <p:spPr>
-          <a:xfrm>
-            <a:off x="2103120" y="4014215"/>
-            <a:ext cx="1280160" cy="201168"/>
-          </a:xfrm>
-          <a:prstGeom prst="rect">
-            <a:avLst/>
-          </a:prstGeom>
-          <a:noFill/>
-        </p:spPr>
-        <p:txBody>
-          <a:bodyPr wrap="square" lIns="18288" rIns="18288" tIns="9144" bIns="9144" anchor="ctr">
-            <a:spAutoFit/>
-          </a:bodyPr>
-          <a:lstStyle/>
-          <a:p>
-            <a:pPr algn="l"/>
-            <a:r>
-              <a:rPr sz="800" b="0" i="1">
-                <a:solidFill>
-                  <a:srgbClr val="6B7A88"/>
-                </a:solidFill>
-                <a:latin typeface="Calibri"/>
-              </a:rPr>
-              <a:t>Arrays + JIT + reuse</a:t>
-            </a:r>
-          </a:p>
-        </p:txBody>
-      </p:sp>
-      <p:sp>
-        <p:nvSpPr>
-          <p:cNvPr id="31" name="Rectangle 30"/>
+              <a:t>log scale  ·  state visits per second of wall-clock</a:t>
+            </a:r>
+          </a:p>
+        </p:txBody>
+      </p:sp>
+      <p:sp>
+        <p:nvSpPr>
+          <p:cNvPr id="30" name="Rectangle 29"/>
           <p:cNvSpPr/>
           <p:nvPr/>
         </p:nvSpPr>
         <p:spPr>
           <a:xfrm>
-            <a:off x="3428999" y="4014215"/>
-            <a:ext cx="2377440" cy="201168"/>
+            <a:off x="7178040" y="3246120"/>
+            <a:ext cx="1508760" cy="1097280"/>
           </a:xfrm>
           <a:prstGeom prst="rect">
             <a:avLst/>
           </a:prstGeom>
           <a:solidFill>
-            <a:srgbClr val="F4A341"/>
+            <a:srgbClr val="21295C"/>
           </a:solidFill>
           <a:ln>
             <a:noFill/>
@@ -4414,14 +4379,14 @@
       </p:sp>
       <p:sp>
         <p:nvSpPr>
-          <p:cNvPr id="32" name="TextBox 31"/>
+          <p:cNvPr id="31" name="TextBox 30"/>
           <p:cNvSpPr txBox="1"/>
           <p:nvPr/>
         </p:nvSpPr>
         <p:spPr>
           <a:xfrm>
-            <a:off x="5852159" y="4014215"/>
-            <a:ext cx="868680" cy="201168"/>
+            <a:off x="7178040" y="3291840"/>
+            <a:ext cx="1508760" cy="228600"/>
           </a:xfrm>
           <a:prstGeom prst="rect">
             <a:avLst/>
@@ -4429,34 +4394,34 @@
           <a:noFill/>
         </p:spPr>
         <p:txBody>
-          <a:bodyPr wrap="square" lIns="18288" rIns="18288" tIns="9144" bIns="9144" anchor="ctr">
+          <a:bodyPr wrap="square" lIns="18288" rIns="18288" tIns="9144" bIns="9144" anchor="t">
             <a:spAutoFit/>
           </a:bodyPr>
           <a:lstStyle/>
           <a:p>
-            <a:pPr algn="l"/>
-            <a:r>
-              <a:rPr sz="1000" b="0" i="0">
-                <a:solidFill>
-                  <a:srgbClr val="121E3F"/>
+            <a:pPr algn="ctr"/>
+            <a:r>
+              <a:rPr sz="900" b="1" i="0">
+                <a:solidFill>
+                  <a:srgbClr val="F4A341"/>
                 </a:solidFill>
                 <a:latin typeface="Calibri"/>
               </a:rPr>
-              <a:t>220 k / s</a:t>
-            </a:r>
-          </a:p>
-        </p:txBody>
-      </p:sp>
-      <p:sp>
-        <p:nvSpPr>
-          <p:cNvPr id="33" name="TextBox 32"/>
+              <a:t>SPEEDUP</a:t>
+            </a:r>
+          </a:p>
+        </p:txBody>
+      </p:sp>
+      <p:sp>
+        <p:nvSpPr>
+          <p:cNvPr id="32" name="TextBox 31"/>
           <p:cNvSpPr txBox="1"/>
           <p:nvPr/>
         </p:nvSpPr>
         <p:spPr>
           <a:xfrm>
-            <a:off x="457200" y="4306824"/>
-            <a:ext cx="6263640" cy="182880"/>
+            <a:off x="7178040" y="3520440"/>
+            <a:ext cx="1508760" cy="548640"/>
           </a:xfrm>
           <a:prstGeom prst="rect">
             <a:avLst/>
@@ -4464,20 +4429,55 @@
           <a:noFill/>
         </p:spPr>
         <p:txBody>
+          <a:bodyPr wrap="square" lIns="18288" rIns="18288" tIns="9144" bIns="9144" anchor="ctr">
+            <a:spAutoFit/>
+          </a:bodyPr>
+          <a:lstStyle/>
+          <a:p>
+            <a:pPr algn="ctr"/>
+            <a:r>
+              <a:rPr sz="3200" b="1" i="0">
+                <a:solidFill>
+                  <a:srgbClr val="FFFFFF"/>
+                </a:solidFill>
+                <a:latin typeface="Cambria"/>
+              </a:rPr>
+              <a:t>≈ 44×</a:t>
+            </a:r>
+          </a:p>
+        </p:txBody>
+      </p:sp>
+      <p:sp>
+        <p:nvSpPr>
+          <p:cNvPr id="33" name="TextBox 32"/>
+          <p:cNvSpPr txBox="1"/>
+          <p:nvPr/>
+        </p:nvSpPr>
+        <p:spPr>
+          <a:xfrm>
+            <a:off x="7178040" y="4069080"/>
+            <a:ext cx="1508760" cy="228600"/>
+          </a:xfrm>
+          <a:prstGeom prst="rect">
+            <a:avLst/>
+          </a:prstGeom>
+          <a:noFill/>
+        </p:spPr>
+        <p:txBody>
           <a:bodyPr wrap="square" lIns="18288" rIns="18288" tIns="9144" bIns="9144" anchor="t">
             <a:spAutoFit/>
           </a:bodyPr>
           <a:lstStyle/>
           <a:p>
-            <a:pPr algn="l"/>
+            <a:pPr algn="ctr"/>
             <a:r>
               <a:rPr sz="800" b="0" i="1">
                 <a:solidFill>
-                  <a:srgbClr val="6B7A88"/>
+                  <a:srgbClr val="5AA4B8"/>
                 </a:solidFill>
                 <a:latin typeface="Calibri"/>
               </a:rPr>
-              <a:t>log scale  ·  state visits per second of wall-clock</a:t>
+              <a:t>vs pure Python</a:t>
             </a:r>
           </a:p>
         </p:txBody>
@@ -4490,14 +4490,14 @@
         </p:nvSpPr>
         <p:spPr>
           <a:xfrm>
-            <a:off x="7178040" y="3246120"/>
-            <a:ext cx="1508760" cy="1097280"/>
+            <a:off x="457200" y="4526280"/>
+            <a:ext cx="5212080" cy="457200"/>
           </a:xfrm>
           <a:prstGeom prst="rect">
             <a:avLst/>
           </a:prstGeom>
           <a:solidFill>
-            <a:srgbClr val="21295C"/>
+            <a:srgbClr val="E6F1F5"/>
           </a:solidFill>
           <a:ln>
             <a:noFill/>
@@ -4528,125 +4528,20 @@
       </p:sp>
       <p:sp>
         <p:nvSpPr>
-          <p:cNvPr id="35" name="TextBox 34"/>
-          <p:cNvSpPr txBox="1"/>
-          <p:nvPr/>
-        </p:nvSpPr>
-        <p:spPr>
-          <a:xfrm>
-            <a:off x="7178040" y="3291840"/>
-            <a:ext cx="1508760" cy="228600"/>
-          </a:xfrm>
-          <a:prstGeom prst="rect">
-            <a:avLst/>
-          </a:prstGeom>
-          <a:noFill/>
-        </p:spPr>
-        <p:txBody>
-          <a:bodyPr wrap="square" lIns="18288" rIns="18288" tIns="9144" bIns="9144" anchor="t">
-            <a:spAutoFit/>
-          </a:bodyPr>
-          <a:lstStyle/>
-          <a:p>
-            <a:pPr algn="ctr"/>
-            <a:r>
-              <a:rPr sz="900" b="1" i="0">
-                <a:solidFill>
-                  <a:srgbClr val="F4A341"/>
-                </a:solidFill>
-                <a:latin typeface="Calibri"/>
-              </a:rPr>
-              <a:t>SPEEDUP</a:t>
-            </a:r>
-          </a:p>
-        </p:txBody>
-      </p:sp>
-      <p:sp>
-        <p:nvSpPr>
-          <p:cNvPr id="36" name="TextBox 35"/>
-          <p:cNvSpPr txBox="1"/>
-          <p:nvPr/>
-        </p:nvSpPr>
-        <p:spPr>
-          <a:xfrm>
-            <a:off x="7178040" y="3520440"/>
-            <a:ext cx="1508760" cy="548640"/>
-          </a:xfrm>
-          <a:prstGeom prst="rect">
-            <a:avLst/>
-          </a:prstGeom>
-          <a:noFill/>
-        </p:spPr>
-        <p:txBody>
-          <a:bodyPr wrap="square" lIns="18288" rIns="18288" tIns="9144" bIns="9144" anchor="ctr">
-            <a:spAutoFit/>
-          </a:bodyPr>
-          <a:lstStyle/>
-          <a:p>
-            <a:pPr algn="ctr"/>
-            <a:r>
-              <a:rPr sz="3200" b="1" i="0">
-                <a:solidFill>
-                  <a:srgbClr val="FFFFFF"/>
-                </a:solidFill>
-                <a:latin typeface="Cambria"/>
-              </a:rPr>
-              <a:t>≈ 44×</a:t>
-            </a:r>
-          </a:p>
-        </p:txBody>
-      </p:sp>
-      <p:sp>
-        <p:nvSpPr>
-          <p:cNvPr id="37" name="TextBox 36"/>
-          <p:cNvSpPr txBox="1"/>
-          <p:nvPr/>
-        </p:nvSpPr>
-        <p:spPr>
-          <a:xfrm>
-            <a:off x="7178040" y="4069080"/>
-            <a:ext cx="1508760" cy="228600"/>
-          </a:xfrm>
-          <a:prstGeom prst="rect">
-            <a:avLst/>
-          </a:prstGeom>
-          <a:noFill/>
-        </p:spPr>
-        <p:txBody>
-          <a:bodyPr wrap="square" lIns="18288" rIns="18288" tIns="9144" bIns="9144" anchor="t">
-            <a:spAutoFit/>
-          </a:bodyPr>
-          <a:lstStyle/>
-          <a:p>
-            <a:pPr algn="ctr"/>
-            <a:r>
-              <a:rPr sz="800" b="0" i="1">
-                <a:solidFill>
-                  <a:srgbClr val="5AA4B8"/>
-                </a:solidFill>
-                <a:latin typeface="Calibri"/>
-              </a:rPr>
-              <a:t>vs pure Python</a:t>
-            </a:r>
-          </a:p>
-        </p:txBody>
-      </p:sp>
-      <p:sp>
-        <p:nvSpPr>
-          <p:cNvPr id="38" name="Rectangle 37"/>
+          <p:cNvPr id="35" name="Rectangle 34"/>
           <p:cNvSpPr/>
           <p:nvPr/>
         </p:nvSpPr>
         <p:spPr>
           <a:xfrm>
             <a:off x="457200" y="4526280"/>
-            <a:ext cx="5212080" cy="457200"/>
+            <a:ext cx="91440" cy="457200"/>
           </a:xfrm>
           <a:prstGeom prst="rect">
             <a:avLst/>
           </a:prstGeom>
           <a:solidFill>
-            <a:srgbClr val="E6F1F5"/>
+            <a:srgbClr val="065A82"/>
           </a:solidFill>
           <a:ln>
             <a:noFill/>
@@ -4677,20 +4572,90 @@
       </p:sp>
       <p:sp>
         <p:nvSpPr>
-          <p:cNvPr id="39" name="Rectangle 38"/>
+          <p:cNvPr id="36" name="TextBox 35"/>
+          <p:cNvSpPr txBox="1"/>
+          <p:nvPr/>
+        </p:nvSpPr>
+        <p:spPr>
+          <a:xfrm>
+            <a:off x="640080" y="4562856"/>
+            <a:ext cx="4937760" cy="201168"/>
+          </a:xfrm>
+          <a:prstGeom prst="rect">
+            <a:avLst/>
+          </a:prstGeom>
+          <a:noFill/>
+        </p:spPr>
+        <p:txBody>
+          <a:bodyPr wrap="square" lIns="18288" rIns="18288" tIns="9144" bIns="9144" anchor="t">
+            <a:spAutoFit/>
+          </a:bodyPr>
+          <a:lstStyle/>
+          <a:p>
+            <a:pPr algn="l"/>
+            <a:r>
+              <a:rPr sz="1000" b="1" i="0">
+                <a:solidFill>
+                  <a:srgbClr val="21295C"/>
+                </a:solidFill>
+                <a:latin typeface="Calibri"/>
+              </a:rPr>
+              <a:t>Where the ~44× comes from</a:t>
+            </a:r>
+          </a:p>
+        </p:txBody>
+      </p:sp>
+      <p:sp>
+        <p:nvSpPr>
+          <p:cNvPr id="37" name="TextBox 36"/>
+          <p:cNvSpPr txBox="1"/>
+          <p:nvPr/>
+        </p:nvSpPr>
+        <p:spPr>
+          <a:xfrm>
+            <a:off x="640080" y="4754880"/>
+            <a:ext cx="4937760" cy="201168"/>
+          </a:xfrm>
+          <a:prstGeom prst="rect">
+            <a:avLst/>
+          </a:prstGeom>
+          <a:noFill/>
+        </p:spPr>
+        <p:txBody>
+          <a:bodyPr wrap="square" lIns="18288" rIns="18288" tIns="9144" bIns="9144" anchor="t">
+            <a:spAutoFit/>
+          </a:bodyPr>
+          <a:lstStyle/>
+          <a:p>
+            <a:pPr algn="l"/>
+            <a:r>
+              <a:rPr sz="900" b="0" i="1">
+                <a:solidFill>
+                  <a:srgbClr val="334455"/>
+                </a:solidFill>
+                <a:latin typeface="Calibri"/>
+              </a:rPr>
+              <a:t>Numba JIT alone: ~6×  (5 k → 30 k)   ·   Flat-array layout: another ~7×  (30 k → 220 k).</a:t>
+            </a:r>
+          </a:p>
+        </p:txBody>
+      </p:sp>
+      <p:sp>
+        <p:nvSpPr>
+          <p:cNvPr id="38" name="Rectangle 37"/>
           <p:cNvSpPr/>
           <p:nvPr/>
         </p:nvSpPr>
         <p:spPr>
           <a:xfrm>
-            <a:off x="457200" y="4526280"/>
-            <a:ext cx="91440" cy="457200"/>
+            <a:off x="5760720" y="4526280"/>
+            <a:ext cx="2926080" cy="457200"/>
           </a:xfrm>
           <a:prstGeom prst="rect">
             <a:avLst/>
           </a:prstGeom>
           <a:solidFill>
-            <a:srgbClr val="065A82"/>
+            <a:srgbClr val="E6F1F5"/>
           </a:solidFill>
           <a:ln>
             <a:noFill/>
@@ -4721,90 +4686,20 @@
       </p:sp>
       <p:sp>
         <p:nvSpPr>
-          <p:cNvPr id="40" name="TextBox 39"/>
-          <p:cNvSpPr txBox="1"/>
-          <p:nvPr/>
-        </p:nvSpPr>
-        <p:spPr>
-          <a:xfrm>
-            <a:off x="640080" y="4562856"/>
-            <a:ext cx="4937760" cy="201168"/>
-          </a:xfrm>
-          <a:prstGeom prst="rect">
-            <a:avLst/>
-          </a:prstGeom>
-          <a:noFill/>
-        </p:spPr>
-        <p:txBody>
-          <a:bodyPr wrap="square" lIns="18288" rIns="18288" tIns="9144" bIns="9144" anchor="t">
-            <a:spAutoFit/>
-          </a:bodyPr>
-          <a:lstStyle/>
-          <a:p>
-            <a:pPr algn="l"/>
-            <a:r>
-              <a:rPr sz="1000" b="1" i="0">
-                <a:solidFill>
-                  <a:srgbClr val="21295C"/>
-                </a:solidFill>
-                <a:latin typeface="Calibri"/>
-              </a:rPr>
-              <a:t>What tree reuse really buys</a:t>
-            </a:r>
-          </a:p>
-        </p:txBody>
-      </p:sp>
-      <p:sp>
-        <p:nvSpPr>
-          <p:cNvPr id="41" name="TextBox 40"/>
-          <p:cNvSpPr txBox="1"/>
-          <p:nvPr/>
-        </p:nvSpPr>
-        <p:spPr>
-          <a:xfrm>
-            <a:off x="640080" y="4754880"/>
-            <a:ext cx="4937760" cy="201168"/>
-          </a:xfrm>
-          <a:prstGeom prst="rect">
-            <a:avLst/>
-          </a:prstGeom>
-          <a:noFill/>
-        </p:spPr>
-        <p:txBody>
-          <a:bodyPr wrap="square" lIns="18288" rIns="18288" tIns="9144" bIns="9144" anchor="t">
-            <a:spAutoFit/>
-          </a:bodyPr>
-          <a:lstStyle/>
-          <a:p>
-            <a:pPr algn="l"/>
-            <a:r>
-              <a:rPr sz="900" b="0" i="1">
-                <a:solidFill>
-                  <a:srgbClr val="334455"/>
-                </a:solidFill>
-                <a:latin typeface="Calibri"/>
-              </a:rPr>
-              <a:t>Raw iter/s ~ unchanged; reuse compounds search effort across turns (~12% inherited) — same kernel, deeper effective tree.</a:t>
-            </a:r>
-          </a:p>
-        </p:txBody>
-      </p:sp>
-      <p:sp>
-        <p:nvSpPr>
-          <p:cNvPr id="42" name="Rectangle 41"/>
+          <p:cNvPr id="39" name="Rectangle 38"/>
           <p:cNvSpPr/>
           <p:nvPr/>
         </p:nvSpPr>
         <p:spPr>
           <a:xfrm>
             <a:off x="5760720" y="4526280"/>
-            <a:ext cx="2926080" cy="457200"/>
+            <a:ext cx="91440" cy="457200"/>
           </a:xfrm>
           <a:prstGeom prst="rect">
             <a:avLst/>
           </a:prstGeom>
           <a:solidFill>
-            <a:srgbClr val="E6F1F5"/>
+            <a:srgbClr val="2E8B57"/>
           </a:solidFill>
           <a:ln>
             <a:noFill/>
@@ -4835,51 +4730,7 @@
       </p:sp>
       <p:sp>
         <p:nvSpPr>
-          <p:cNvPr id="43" name="Rectangle 42"/>
-          <p:cNvSpPr/>
-          <p:nvPr/>
-        </p:nvSpPr>
-        <p:spPr>
-          <a:xfrm>
-            <a:off x="5760720" y="4526280"/>
-            <a:ext cx="91440" cy="457200"/>
-          </a:xfrm>
-          <a:prstGeom prst="rect">
-            <a:avLst/>
-          </a:prstGeom>
-          <a:solidFill>
-            <a:srgbClr val="2E8B57"/>
-          </a:solidFill>
-          <a:ln>
-            <a:noFill/>
-          </a:ln>
-          <a:effectLst/>
-        </p:spPr>
-        <p:style>
-          <a:lnRef idx="1">
-            <a:schemeClr val="accent1"/>
-          </a:lnRef>
-          <a:fillRef idx="3">
-            <a:schemeClr val="accent1"/>
-          </a:fillRef>
-          <a:effectRef idx="2">
-            <a:schemeClr val="accent1"/>
-          </a:effectRef>
-          <a:fontRef idx="minor">
-            <a:schemeClr val="lt1"/>
-          </a:fontRef>
-        </p:style>
-        <p:txBody>
-          <a:bodyPr rtlCol="0" anchor="ctr"/>
-          <a:lstStyle/>
-          <a:p>
-            <a:pPr algn="ctr"/>
-          </a:p>
-        </p:txBody>
-      </p:sp>
-      <p:sp>
-        <p:nvSpPr>
-          <p:cNvPr id="44" name="TextBox 43"/>
+          <p:cNvPr id="40" name="TextBox 39"/>
           <p:cNvSpPr txBox="1"/>
           <p:nvPr/>
         </p:nvSpPr>
@@ -4907,14 +4758,14 @@
                 </a:solidFill>
                 <a:latin typeface="Calibri"/>
               </a:rPr>
-              <a:t>Solver early exit</a:t>
-            </a:r>
-          </a:p>
-        </p:txBody>
-      </p:sp>
-      <p:sp>
-        <p:nvSpPr>
-          <p:cNvPr id="45" name="TextBox 44"/>
+              <a:t>Practical impact</a:t>
+            </a:r>
+          </a:p>
+        </p:txBody>
+      </p:sp>
+      <p:sp>
+        <p:nvSpPr>
+          <p:cNvPr id="41" name="TextBox 40"/>
           <p:cNvSpPr txBox="1"/>
           <p:nvPr/>
         </p:nvSpPr>
@@ -4942,7 +4793,7 @@
                 </a:solidFill>
                 <a:latin typeface="Calibri"/>
               </a:rPr>
-              <a:t>Proven positions return in &lt; 1 ms via AND/OR propagation.</a:t>
+              <a:t>Competitive moves in ~50 ms · real-time GUI play.</a:t>
             </a:r>
           </a:p>
         </p:txBody>
